--- a/cursos/recursos/el-mapa-de-los-finales/02-peon-de-torre-y-rincones.pptx
+++ b/cursos/recursos/el-mapa-de-los-finales/02-peon-de-torre-y-rincones.pptx
@@ -4130,7 +4130,7 @@
                 </a:solidFill>
                 <a:latin typeface="Calibri"/>
               </a:rPr>
-              <a:t>Con un alfil y el rey en cada rincón, jugá contra el motor las dos posiciones hasta convencerte de la diferencia.</a:t>
+              <a:t>Con un alfil y el rey en cada rincón, juega contra el motor las dos posiciones hasta convencerte de la diferencia.</a:t>
             </a:r>
           </a:p>
           <a:p>
@@ -4201,7 +4201,7 @@
                 </a:solidFill>
                 <a:latin typeface="Calibri"/>
               </a:rPr>
-              <a:t>•  Recorré cada línea principal hasta entender el porqué de cada jugada.</a:t>
+              <a:t>•  Recorre cada línea principal hasta entender el porqué de cada jugada.</a:t>
             </a:r>
           </a:p>
           <a:p>
@@ -4217,7 +4217,7 @@
                 </a:solidFill>
                 <a:latin typeface="Calibri"/>
               </a:rPr>
-              <a:t>•  Practicá primero las posiciones clave, después las demás.</a:t>
+              <a:t>•  Practica primero las posiciones clave, después las demás.</a:t>
             </a:r>
           </a:p>
           <a:p>
@@ -4233,7 +4233,7 @@
                 </a:solidFill>
                 <a:latin typeface="Calibri"/>
               </a:rPr>
-              <a:t>•  Anotá las reglas de cada final con tus palabras.</a:t>
+              <a:t>•  Anota las reglas de cada final con tus palabras.</a:t>
             </a:r>
           </a:p>
         </p:txBody>
